--- a/@Materi Kuliah/Materi_Aktuaria_1/Presentasi_Aktuaria_1_Profesional_dari_HTML.pptx
+++ b/@Materi Kuliah/Materi_Aktuaria_1/Presentasi_Aktuaria_1_Profesional_dari_HTML.pptx
@@ -2,131 +2,36 @@
 <file path=ppt/presentation.xml><?xml version="1.0" encoding="utf-8"?>
 <p:presentation xmlns:p="http://schemas.openxmlformats.org/presentationml/2006/main">
   <p:sldMasterIdLst>
-    <p:sldMasterId xmlns:r="http://schemas.openxmlformats.org/officeDocument/2006/relationships" id="2147483648" r:id="Rc464c025facb4d84"/>
+    <p:sldMasterId xmlns:r="http://schemas.openxmlformats.org/officeDocument/2006/relationships" id="2147483648" r:id="R314948d3c54246a6"/>
   </p:sldMasterIdLst>
   <p:notesMasterIdLst>
-    <p:notesMasterId xmlns:r="http://schemas.openxmlformats.org/officeDocument/2006/relationships" r:id="R56236f8b108841f6"/>
+    <p:notesMasterId xmlns:r="http://schemas.openxmlformats.org/officeDocument/2006/relationships" r:id="R7f48d9e9d8444c9e"/>
   </p:notesMasterIdLst>
   <p:sldIdLst>
-    <p:sldId xmlns:r="http://schemas.openxmlformats.org/officeDocument/2006/relationships" id="256" r:id="R7124dc7ab5d1417a"/>
-    <p:sldId xmlns:r="http://schemas.openxmlformats.org/officeDocument/2006/relationships" id="257" r:id="Rdce3f61aa9a44664"/>
-    <p:sldId xmlns:r="http://schemas.openxmlformats.org/officeDocument/2006/relationships" id="258" r:id="R2e8d372dc1114950"/>
-    <p:sldId xmlns:r="http://schemas.openxmlformats.org/officeDocument/2006/relationships" id="259" r:id="R283ee984178b481f"/>
-    <p:sldId xmlns:r="http://schemas.openxmlformats.org/officeDocument/2006/relationships" id="260" r:id="Rb224f7af11944bc1"/>
-    <p:sldId xmlns:r="http://schemas.openxmlformats.org/officeDocument/2006/relationships" id="261" r:id="R9209839b843b47ae"/>
-    <p:sldId xmlns:r="http://schemas.openxmlformats.org/officeDocument/2006/relationships" id="262" r:id="R5fce5470984341a8"/>
-    <p:sldId xmlns:r="http://schemas.openxmlformats.org/officeDocument/2006/relationships" id="263" r:id="Rbb5f747ddc6347dd"/>
-    <p:sldId xmlns:r="http://schemas.openxmlformats.org/officeDocument/2006/relationships" id="264" r:id="R4216371aba344d2e"/>
-    <p:sldId xmlns:r="http://schemas.openxmlformats.org/officeDocument/2006/relationships" id="265" r:id="R809ca20b62434ee4"/>
-    <p:sldId xmlns:r="http://schemas.openxmlformats.org/officeDocument/2006/relationships" id="266" r:id="R6297bc6eed064baa"/>
-    <p:sldId xmlns:r="http://schemas.openxmlformats.org/officeDocument/2006/relationships" id="267" r:id="R4d738474f6b74a61"/>
-    <p:sldId xmlns:r="http://schemas.openxmlformats.org/officeDocument/2006/relationships" id="268" r:id="Rc1169016f1034070"/>
-    <p:sldId xmlns:r="http://schemas.openxmlformats.org/officeDocument/2006/relationships" id="269" r:id="R18f9a525296643fb"/>
-    <p:sldId xmlns:r="http://schemas.openxmlformats.org/officeDocument/2006/relationships" id="270" r:id="R019c51655cb94a5b"/>
-    <p:sldId xmlns:r="http://schemas.openxmlformats.org/officeDocument/2006/relationships" id="271" r:id="R6db165ed9d044e09"/>
-    <p:sldId xmlns:r="http://schemas.openxmlformats.org/officeDocument/2006/relationships" id="272" r:id="R38540178935044c6"/>
-    <p:sldId xmlns:r="http://schemas.openxmlformats.org/officeDocument/2006/relationships" id="273" r:id="Rf66c0541b02844ff"/>
-    <p:sldId xmlns:r="http://schemas.openxmlformats.org/officeDocument/2006/relationships" id="274" r:id="Ra5d1ea3e96a040e0"/>
-    <p:sldId xmlns:r="http://schemas.openxmlformats.org/officeDocument/2006/relationships" id="275" r:id="Rc423ba563128432c"/>
-    <p:sldId xmlns:r="http://schemas.openxmlformats.org/officeDocument/2006/relationships" id="276" r:id="Ra24108b3c16d4d3f"/>
+    <p:sldId xmlns:r="http://schemas.openxmlformats.org/officeDocument/2006/relationships" id="256" r:id="R86da1cb3e0cc43af"/>
+    <p:sldId xmlns:r="http://schemas.openxmlformats.org/officeDocument/2006/relationships" id="257" r:id="R4b34efa9baad4f62"/>
+    <p:sldId xmlns:r="http://schemas.openxmlformats.org/officeDocument/2006/relationships" id="258" r:id="R054b8589f6db4f5e"/>
+    <p:sldId xmlns:r="http://schemas.openxmlformats.org/officeDocument/2006/relationships" id="259" r:id="R8d37ff8605d340e8"/>
+    <p:sldId xmlns:r="http://schemas.openxmlformats.org/officeDocument/2006/relationships" id="260" r:id="R7b67020d59ea4468"/>
+    <p:sldId xmlns:r="http://schemas.openxmlformats.org/officeDocument/2006/relationships" id="261" r:id="R50880ca470044793"/>
+    <p:sldId xmlns:r="http://schemas.openxmlformats.org/officeDocument/2006/relationships" id="262" r:id="Rc85d465fd81e479d"/>
+    <p:sldId xmlns:r="http://schemas.openxmlformats.org/officeDocument/2006/relationships" id="263" r:id="Rdb6222aa2b6e4d47"/>
+    <p:sldId xmlns:r="http://schemas.openxmlformats.org/officeDocument/2006/relationships" id="264" r:id="Rb75be3c148844207"/>
+    <p:sldId xmlns:r="http://schemas.openxmlformats.org/officeDocument/2006/relationships" id="265" r:id="R630ed4a796c348b0"/>
+    <p:sldId xmlns:r="http://schemas.openxmlformats.org/officeDocument/2006/relationships" id="266" r:id="R781c9b6e5fd0446c"/>
+    <p:sldId xmlns:r="http://schemas.openxmlformats.org/officeDocument/2006/relationships" id="267" r:id="R5a5d0203e0ff49e1"/>
+    <p:sldId xmlns:r="http://schemas.openxmlformats.org/officeDocument/2006/relationships" id="268" r:id="R08b30a1886a4490f"/>
+    <p:sldId xmlns:r="http://schemas.openxmlformats.org/officeDocument/2006/relationships" id="269" r:id="Rd358d983ccf3466c"/>
+    <p:sldId xmlns:r="http://schemas.openxmlformats.org/officeDocument/2006/relationships" id="270" r:id="R76c48b30b0fc4b63"/>
+    <p:sldId xmlns:r="http://schemas.openxmlformats.org/officeDocument/2006/relationships" id="271" r:id="R355586def65f4ad9"/>
+    <p:sldId xmlns:r="http://schemas.openxmlformats.org/officeDocument/2006/relationships" id="272" r:id="R363f41b2b32e460c"/>
+    <p:sldId xmlns:r="http://schemas.openxmlformats.org/officeDocument/2006/relationships" id="273" r:id="Rbad8458fb96b4c34"/>
+    <p:sldId xmlns:r="http://schemas.openxmlformats.org/officeDocument/2006/relationships" id="274" r:id="R0d96fd6d7cf544de"/>
+    <p:sldId xmlns:r="http://schemas.openxmlformats.org/officeDocument/2006/relationships" id="275" r:id="R82188af984ac4823"/>
+    <p:sldId xmlns:r="http://schemas.openxmlformats.org/officeDocument/2006/relationships" id="276" r:id="Rad964fe856e74ead"/>
   </p:sldIdLst>
   <p:sldSz cx="12192000" cy="6858000"/>
   <p:notesSz cx="6858000" cy="9144000"/>
-  <p:defaultTextStyle>
-    <a:defPPr xmlns:a="http://schemas.openxmlformats.org/drawingml/2006/main">
-      <a:defRPr lang="en-US"/>
-    </a:defPPr>
-    <a:lvl1pPr xmlns:a="http://schemas.openxmlformats.org/drawingml/2006/main" marL="0" indent="0" algn="l" defTabSz="914400">
-      <a:defRPr sz="1800" kern="1200">
-        <a:solidFill>
-          <a:schemeClr val="tx1"/>
-        </a:solidFill>
-        <a:latin typeface="+mn-lt"/>
-        <a:ea typeface="+mn-ea"/>
-        <a:cs typeface="+mn-cs"/>
-      </a:defRPr>
-    </a:lvl1pPr>
-    <a:lvl2pPr xmlns:a="http://schemas.openxmlformats.org/drawingml/2006/main" marL="457200" indent="0" algn="l" defTabSz="914400">
-      <a:defRPr sz="1800" kern="1200">
-        <a:solidFill>
-          <a:schemeClr val="tx1"/>
-        </a:solidFill>
-        <a:latin typeface="+mn-lt"/>
-        <a:ea typeface="+mn-ea"/>
-        <a:cs typeface="+mn-cs"/>
-      </a:defRPr>
-    </a:lvl2pPr>
-    <a:lvl3pPr xmlns:a="http://schemas.openxmlformats.org/drawingml/2006/main" marL="914400" indent="0" algn="l" defTabSz="914400">
-      <a:defRPr sz="1800" kern="1200">
-        <a:solidFill>
-          <a:schemeClr val="tx1"/>
-        </a:solidFill>
-        <a:latin typeface="+mn-lt"/>
-        <a:ea typeface="+mn-ea"/>
-        <a:cs typeface="+mn-cs"/>
-      </a:defRPr>
-    </a:lvl3pPr>
-    <a:lvl4pPr xmlns:a="http://schemas.openxmlformats.org/drawingml/2006/main" marL="1371600" indent="0" algn="l" defTabSz="914400">
-      <a:defRPr sz="1800" kern="1200">
-        <a:solidFill>
-          <a:schemeClr val="tx1"/>
-        </a:solidFill>
-        <a:latin typeface="+mn-lt"/>
-        <a:ea typeface="+mn-ea"/>
-        <a:cs typeface="+mn-cs"/>
-      </a:defRPr>
-    </a:lvl4pPr>
-    <a:lvl5pPr xmlns:a="http://schemas.openxmlformats.org/drawingml/2006/main" marL="1828800" indent="0" algn="l" defTabSz="914400">
-      <a:defRPr sz="1800" kern="1200">
-        <a:solidFill>
-          <a:schemeClr val="tx1"/>
-        </a:solidFill>
-        <a:latin typeface="+mn-lt"/>
-        <a:ea typeface="+mn-ea"/>
-        <a:cs typeface="+mn-cs"/>
-      </a:defRPr>
-    </a:lvl5pPr>
-    <a:lvl6pPr xmlns:a="http://schemas.openxmlformats.org/drawingml/2006/main" marL="2286000" indent="0" algn="l" defTabSz="914400">
-      <a:defRPr sz="1800" kern="1200">
-        <a:solidFill>
-          <a:schemeClr val="tx1"/>
-        </a:solidFill>
-        <a:latin typeface="+mn-lt"/>
-        <a:ea typeface="+mn-ea"/>
-        <a:cs typeface="+mn-cs"/>
-      </a:defRPr>
-    </a:lvl6pPr>
-    <a:lvl7pPr xmlns:a="http://schemas.openxmlformats.org/drawingml/2006/main" marL="2743200" indent="0" algn="l" defTabSz="914400">
-      <a:defRPr sz="1800" kern="1200">
-        <a:solidFill>
-          <a:schemeClr val="tx1"/>
-        </a:solidFill>
-        <a:latin typeface="+mn-lt"/>
-        <a:ea typeface="+mn-ea"/>
-        <a:cs typeface="+mn-cs"/>
-      </a:defRPr>
-    </a:lvl7pPr>
-    <a:lvl8pPr xmlns:a="http://schemas.openxmlformats.org/drawingml/2006/main" marL="3200400" indent="0" algn="l" defTabSz="914400">
-      <a:defRPr sz="1800" kern="1200">
-        <a:solidFill>
-          <a:schemeClr val="tx1"/>
-        </a:solidFill>
-        <a:latin typeface="+mn-lt"/>
-        <a:ea typeface="+mn-ea"/>
-        <a:cs typeface="+mn-cs"/>
-      </a:defRPr>
-    </a:lvl8pPr>
-    <a:lvl9pPr xmlns:a="http://schemas.openxmlformats.org/drawingml/2006/main" marL="3657600" indent="0" algn="l" defTabSz="914400">
-      <a:defRPr sz="1800" kern="1200">
-        <a:solidFill>
-          <a:schemeClr val="tx1"/>
-        </a:solidFill>
-        <a:latin typeface="+mn-lt"/>
-        <a:ea typeface="+mn-ea"/>
-        <a:cs typeface="+mn-cs"/>
-      </a:defRPr>
-    </a:lvl9pPr>
-  </p:defaultTextStyle>
 </p:presentation>
 </file>
 
@@ -1453,7 +1358,26 @@
         <p:txBody>
           <a:bodyPr xmlns:a="http://schemas.openxmlformats.org/drawingml/2006/main"/>
           <a:lstStyle xmlns:a="http://schemas.openxmlformats.org/drawingml/2006/main"/>
-          <a:p xmlns:a="http://schemas.openxmlformats.org/drawingml/2006/main"/>
+          <a:p xmlns:a="http://schemas.openxmlformats.org/drawingml/2006/main">
+            <a:r>
+              <a:t>[Sources]</a:t>
+            </a:r>
+          </a:p>
+          <a:p xmlns:a="http://schemas.openxmlformats.org/drawingml/2006/main">
+            <a:r>
+              <a:t>- RPS mata kuliah Revisi AI 2026, Program Studi S2 Statistika Terapan FMIPA Universitas Padjadjaran.</a:t>
+            </a:r>
+          </a:p>
+          <a:p xmlns:a="http://schemas.openxmlformats.org/drawingml/2006/main">
+            <a:r>
+              <a:t>[/Sources]</a:t>
+            </a:r>
+          </a:p>
+          <a:p xmlns:a="http://schemas.openxmlformats.org/drawingml/2006/main">
+            <a:r>
+              <a:t>Penutup: CPL tetap. AI adalah akselerator ketercapaian CPMK/Sub-CPMK, bukan pengganti penalaran statistika. Tekankan kewajiban prompt log ringkas, sumber, kode/notebook reproducible, validasi, dan audit trail.</a:t>
+            </a:r>
+          </a:p>
         </p:txBody>
       </p:sp>
       <p:sp>
@@ -2010,8 +1934,8 @@
   </p:cSld>
   <p:clrMap bg1="lt1" tx1="dk1" bg2="lt2" tx2="dk2" accent1="accent1" accent2="accent2" accent3="accent3" accent4="accent4" accent5="accent5" accent6="accent6" hlink="hlink" folHlink="folHlink"/>
   <p:sldLayoutIdLst>
-    <p:sldLayoutId xmlns:r="http://schemas.openxmlformats.org/officeDocument/2006/relationships" id="2147483649" r:id="R085fc91e883c4a4c"/>
-    <p:sldLayoutId xmlns:r="http://schemas.openxmlformats.org/officeDocument/2006/relationships" id="2147483650" r:id="R01b7d6f771454f35"/>
+    <p:sldLayoutId xmlns:r="http://schemas.openxmlformats.org/officeDocument/2006/relationships" id="2147483649" r:id="R47f7ecfa5f7f4a22"/>
+    <p:sldLayoutId xmlns:r="http://schemas.openxmlformats.org/officeDocument/2006/relationships" id="2147483650" r:id="R730530f8a97e41d3"/>
   </p:sldLayoutIdLst>
   <p:hf sldNum="0" hdr="0" ftr="0" dt="0"/>
   <p:txStyles>
@@ -2577,7 +2501,7 @@
           <p:nvPr/>
         </p:nvPicPr>
         <p:blipFill>
-          <a:blip xmlns:r="http://schemas.openxmlformats.org/officeDocument/2006/relationships" xmlns:a="http://schemas.openxmlformats.org/drawingml/2006/main" r:embed="R27db87b8281e4a90"/>
+          <a:blip xmlns:r="http://schemas.openxmlformats.org/officeDocument/2006/relationships" xmlns:a="http://schemas.openxmlformats.org/drawingml/2006/main" r:embed="Rd212885790184f4d"/>
           <a:stretch xmlns:a="http://schemas.openxmlformats.org/drawingml/2006/main">
             <a:fillRect l="0" t="0" r="0" b="0"/>
           </a:stretch>
@@ -2723,7 +2647,7 @@
           <p:nvPr/>
         </p:nvPicPr>
         <p:blipFill>
-          <a:blip xmlns:r="http://schemas.openxmlformats.org/officeDocument/2006/relationships" xmlns:a="http://schemas.openxmlformats.org/drawingml/2006/main" r:embed="R0afcd4d91389402f"/>
+          <a:blip xmlns:r="http://schemas.openxmlformats.org/officeDocument/2006/relationships" xmlns:a="http://schemas.openxmlformats.org/drawingml/2006/main" r:embed="Re8aa6639fca74598"/>
           <a:stretch xmlns:a="http://schemas.openxmlformats.org/drawingml/2006/main">
             <a:fillRect l="0" t="0" r="0" b="0"/>
           </a:stretch>
@@ -3345,7 +3269,7 @@
           <p:nvPr/>
         </p:nvPicPr>
         <p:blipFill>
-          <a:blip xmlns:r="http://schemas.openxmlformats.org/officeDocument/2006/relationships" xmlns:a="http://schemas.openxmlformats.org/drawingml/2006/main" r:embed="Rf7ed7c6d8e274510"/>
+          <a:blip xmlns:r="http://schemas.openxmlformats.org/officeDocument/2006/relationships" xmlns:a="http://schemas.openxmlformats.org/drawingml/2006/main" r:embed="R8a8c8c71b634490c"/>
           <a:stretch xmlns:a="http://schemas.openxmlformats.org/drawingml/2006/main">
             <a:fillRect l="0" t="0" r="0" b="0"/>
           </a:stretch>
@@ -5495,7 +5419,7 @@
           <p:nvPr/>
         </p:nvPicPr>
         <p:blipFill>
-          <a:blip xmlns:r="http://schemas.openxmlformats.org/officeDocument/2006/relationships" xmlns:a="http://schemas.openxmlformats.org/drawingml/2006/main" r:embed="R87c854927cb4466b"/>
+          <a:blip xmlns:r="http://schemas.openxmlformats.org/officeDocument/2006/relationships" xmlns:a="http://schemas.openxmlformats.org/drawingml/2006/main" r:embed="R16750c4a0fc54151"/>
           <a:stretch xmlns:a="http://schemas.openxmlformats.org/drawingml/2006/main">
             <a:fillRect l="0" t="0" r="0" b="0"/>
           </a:stretch>
@@ -5774,7 +5698,7 @@
           <p:nvPr/>
         </p:nvPicPr>
         <p:blipFill>
-          <a:blip xmlns:r="http://schemas.openxmlformats.org/officeDocument/2006/relationships" xmlns:a="http://schemas.openxmlformats.org/drawingml/2006/main" r:embed="Rd9a48137e1e542c3"/>
+          <a:blip xmlns:r="http://schemas.openxmlformats.org/officeDocument/2006/relationships" xmlns:a="http://schemas.openxmlformats.org/drawingml/2006/main" r:embed="R18af4d18bd0d4733"/>
           <a:stretch xmlns:a="http://schemas.openxmlformats.org/drawingml/2006/main">
             <a:fillRect l="0" t="0" r="0" b="0"/>
           </a:stretch>
@@ -7308,7 +7232,7 @@
           <p:nvPr/>
         </p:nvPicPr>
         <p:blipFill>
-          <a:blip xmlns:r="http://schemas.openxmlformats.org/officeDocument/2006/relationships" xmlns:a="http://schemas.openxmlformats.org/drawingml/2006/main" r:embed="Rd7eb1f6364794aea"/>
+          <a:blip xmlns:r="http://schemas.openxmlformats.org/officeDocument/2006/relationships" xmlns:a="http://schemas.openxmlformats.org/drawingml/2006/main" r:embed="Rffe3fab10a124f86"/>
           <a:stretch xmlns:a="http://schemas.openxmlformats.org/drawingml/2006/main">
             <a:fillRect l="0" t="0" r="0" b="0"/>
           </a:stretch>
@@ -8477,7 +8401,7 @@
           <p:nvPr/>
         </p:nvPicPr>
         <p:blipFill>
-          <a:blip xmlns:r="http://schemas.openxmlformats.org/officeDocument/2006/relationships" xmlns:a="http://schemas.openxmlformats.org/drawingml/2006/main" r:embed="R93146618bce0444e"/>
+          <a:blip xmlns:r="http://schemas.openxmlformats.org/officeDocument/2006/relationships" xmlns:a="http://schemas.openxmlformats.org/drawingml/2006/main" r:embed="Rbd90b807bfd540da"/>
           <a:stretch xmlns:a="http://schemas.openxmlformats.org/drawingml/2006/main">
             <a:fillRect l="0" t="0" r="0" b="0"/>
           </a:stretch>
@@ -9704,7 +9628,7 @@
           <p:nvPr/>
         </p:nvPicPr>
         <p:blipFill>
-          <a:blip xmlns:r="http://schemas.openxmlformats.org/officeDocument/2006/relationships" xmlns:a="http://schemas.openxmlformats.org/drawingml/2006/main" r:embed="R3fb79bceddea4c4f"/>
+          <a:blip xmlns:r="http://schemas.openxmlformats.org/officeDocument/2006/relationships" xmlns:a="http://schemas.openxmlformats.org/drawingml/2006/main" r:embed="Rc5faeeb370494e5b"/>
           <a:stretch xmlns:a="http://schemas.openxmlformats.org/drawingml/2006/main">
             <a:fillRect l="0" t="0" r="0" b="0"/>
           </a:stretch>
@@ -10909,7 +10833,7 @@
           <p:nvPr/>
         </p:nvPicPr>
         <p:blipFill>
-          <a:blip xmlns:r="http://schemas.openxmlformats.org/officeDocument/2006/relationships" xmlns:a="http://schemas.openxmlformats.org/drawingml/2006/main" r:embed="R18cbb25fe23a419c"/>
+          <a:blip xmlns:r="http://schemas.openxmlformats.org/officeDocument/2006/relationships" xmlns:a="http://schemas.openxmlformats.org/drawingml/2006/main" r:embed="R0071351986e14fa1"/>
           <a:stretch xmlns:a="http://schemas.openxmlformats.org/drawingml/2006/main">
             <a:fillRect l="0" t="0" r="0" b="0"/>
           </a:stretch>
@@ -11188,7 +11112,7 @@
           <p:nvPr/>
         </p:nvPicPr>
         <p:blipFill>
-          <a:blip xmlns:r="http://schemas.openxmlformats.org/officeDocument/2006/relationships" xmlns:a="http://schemas.openxmlformats.org/drawingml/2006/main" r:embed="R3c14189f82f842b0"/>
+          <a:blip xmlns:r="http://schemas.openxmlformats.org/officeDocument/2006/relationships" xmlns:a="http://schemas.openxmlformats.org/drawingml/2006/main" r:embed="R7af96a353a5a4fb1"/>
           <a:stretch xmlns:a="http://schemas.openxmlformats.org/drawingml/2006/main">
             <a:fillRect l="0" t="0" r="0" b="0"/>
           </a:stretch>
@@ -12733,7 +12657,7 @@
           <p:nvPr/>
         </p:nvPicPr>
         <p:blipFill>
-          <a:blip xmlns:r="http://schemas.openxmlformats.org/officeDocument/2006/relationships" xmlns:a="http://schemas.openxmlformats.org/drawingml/2006/main" r:embed="R43501f88460c4b66"/>
+          <a:blip xmlns:r="http://schemas.openxmlformats.org/officeDocument/2006/relationships" xmlns:a="http://schemas.openxmlformats.org/drawingml/2006/main" r:embed="R4e57e7b347ee4e5f"/>
           <a:stretch xmlns:a="http://schemas.openxmlformats.org/drawingml/2006/main">
             <a:fillRect l="0" t="0" r="0" b="0"/>
           </a:stretch>
@@ -14750,7 +14674,7 @@
           <p:nvPr/>
         </p:nvPicPr>
         <p:blipFill>
-          <a:blip xmlns:r="http://schemas.openxmlformats.org/officeDocument/2006/relationships" xmlns:a="http://schemas.openxmlformats.org/drawingml/2006/main" r:embed="R98e2fe7e881842ad"/>
+          <a:blip xmlns:r="http://schemas.openxmlformats.org/officeDocument/2006/relationships" xmlns:a="http://schemas.openxmlformats.org/drawingml/2006/main" r:embed="R5161c40c062849b6"/>
           <a:stretch xmlns:a="http://schemas.openxmlformats.org/drawingml/2006/main">
             <a:fillRect l="0" t="0" r="0" b="0"/>
           </a:stretch>
@@ -15977,7 +15901,7 @@
           <p:nvPr/>
         </p:nvPicPr>
         <p:blipFill>
-          <a:blip xmlns:r="http://schemas.openxmlformats.org/officeDocument/2006/relationships" xmlns:a="http://schemas.openxmlformats.org/drawingml/2006/main" r:embed="R0a92b41dda464bfb"/>
+          <a:blip xmlns:r="http://schemas.openxmlformats.org/officeDocument/2006/relationships" xmlns:a="http://schemas.openxmlformats.org/drawingml/2006/main" r:embed="Rf94cee5fe6e447eb"/>
           <a:stretch xmlns:a="http://schemas.openxmlformats.org/drawingml/2006/main">
             <a:fillRect l="0" t="0" r="0" b="0"/>
           </a:stretch>
@@ -17118,7 +17042,7 @@
           <p:nvPr/>
         </p:nvPicPr>
         <p:blipFill>
-          <a:blip xmlns:r="http://schemas.openxmlformats.org/officeDocument/2006/relationships" xmlns:a="http://schemas.openxmlformats.org/drawingml/2006/main" r:embed="Rc0a997d69e284817"/>
+          <a:blip xmlns:r="http://schemas.openxmlformats.org/officeDocument/2006/relationships" xmlns:a="http://schemas.openxmlformats.org/drawingml/2006/main" r:embed="R3b5a2f77bb3242cd"/>
           <a:stretch xmlns:a="http://schemas.openxmlformats.org/drawingml/2006/main">
             <a:fillRect l="0" t="0" r="0" b="0"/>
           </a:stretch>
@@ -18583,7 +18507,7 @@
           <p:nvPr/>
         </p:nvPicPr>
         <p:blipFill>
-          <a:blip xmlns:r="http://schemas.openxmlformats.org/officeDocument/2006/relationships" xmlns:a="http://schemas.openxmlformats.org/drawingml/2006/main" r:embed="Rdd564c975cbd4ada"/>
+          <a:blip xmlns:r="http://schemas.openxmlformats.org/officeDocument/2006/relationships" xmlns:a="http://schemas.openxmlformats.org/drawingml/2006/main" r:embed="R177d8bcaea8144f8"/>
           <a:stretch xmlns:a="http://schemas.openxmlformats.org/drawingml/2006/main">
             <a:fillRect l="0" t="0" r="0" b="0"/>
           </a:stretch>
@@ -18729,7 +18653,7 @@
           <p:nvPr/>
         </p:nvPicPr>
         <p:blipFill>
-          <a:blip xmlns:r="http://schemas.openxmlformats.org/officeDocument/2006/relationships" xmlns:a="http://schemas.openxmlformats.org/drawingml/2006/main" r:embed="Ra4e41a8efc8c4d8e"/>
+          <a:blip xmlns:r="http://schemas.openxmlformats.org/officeDocument/2006/relationships" xmlns:a="http://schemas.openxmlformats.org/drawingml/2006/main" r:embed="Rc5948f49e6bf4de6"/>
           <a:stretch xmlns:a="http://schemas.openxmlformats.org/drawingml/2006/main">
             <a:fillRect l="0" t="0" r="0" b="0"/>
           </a:stretch>
@@ -18833,7 +18757,7 @@
                 <a:ea typeface="Aptos Display"/>
                 <a:cs typeface="Aptos Display"/>
               </a:rPr>
-              <a:t>Dari data menuju</a:t>
+              <a:t>AI mempercepat proses,</a:t>
             </a:r>
           </a:p>
           <a:p xmlns:a="http://schemas.openxmlformats.org/drawingml/2006/main">
@@ -18849,7 +18773,7 @@
                 <a:ea typeface="Aptos Display"/>
                 <a:cs typeface="Aptos Display"/>
               </a:rPr>
-              <a:t>keputusan yang dapat diuji</a:t>
+              <a:t>penalaran tetap memimpin</a:t>
             </a:r>
           </a:p>
         </p:txBody>
@@ -18916,7 +18840,7 @@
         </p:spPr>
         <p:txBody>
           <a:bodyPr xmlns:a="http://schemas.openxmlformats.org/drawingml/2006/main" wrap="square" lIns="635" tIns="635" rIns="635" bIns="635" anchor="t">
-            <a:normAutofit fontScale="100000"/>
+            <a:normAutofit fontScale="93620"/>
           </a:bodyPr>
           <a:lstStyle xmlns:a="http://schemas.openxmlformats.org/drawingml/2006/main"/>
           <a:p xmlns:a="http://schemas.openxmlformats.org/drawingml/2006/main">
@@ -18932,7 +18856,7 @@
                 <a:ea typeface="Aptos"/>
                 <a:cs typeface="Aptos"/>
               </a:rPr>
-              <a:t>Matematika Aktuaria 1 menghubungkan teori, data, metode, validasi, dan komunikasi untuk menghasilkan keputusan yang sahih, dapat direplikasi, dan bertanggung jawab.</a:t>
+              <a:t>Aktuaria 1 memadukan teori, data, komputasi, validasi, dan komunikasi. AI mempercepat eksplorasi dan pemeriksaan awal; mahasiswa tetap memverifikasi asumsi, kode, hasil numerik, ketidakpastian, sumber, dan dampak sebelum mengambil keputusan.</a:t>
             </a:r>
           </a:p>
         </p:txBody>
@@ -19102,7 +19026,7 @@
           <p:nvPr/>
         </p:nvPicPr>
         <p:blipFill>
-          <a:blip xmlns:r="http://schemas.openxmlformats.org/officeDocument/2006/relationships" xmlns:a="http://schemas.openxmlformats.org/drawingml/2006/main" r:embed="R987553a2c1334007"/>
+          <a:blip xmlns:r="http://schemas.openxmlformats.org/officeDocument/2006/relationships" xmlns:a="http://schemas.openxmlformats.org/drawingml/2006/main" r:embed="R76a2d4b2e9d84ffd"/>
           <a:stretch xmlns:a="http://schemas.openxmlformats.org/drawingml/2006/main">
             <a:fillRect l="0" t="0" r="0" b="0"/>
           </a:stretch>
@@ -20233,7 +20157,7 @@
           <p:nvPr/>
         </p:nvPicPr>
         <p:blipFill>
-          <a:blip xmlns:r="http://schemas.openxmlformats.org/officeDocument/2006/relationships" xmlns:a="http://schemas.openxmlformats.org/drawingml/2006/main" r:embed="Re1de6eae54824f4c"/>
+          <a:blip xmlns:r="http://schemas.openxmlformats.org/officeDocument/2006/relationships" xmlns:a="http://schemas.openxmlformats.org/drawingml/2006/main" r:embed="R4e3879cf06b44a6c"/>
           <a:stretch xmlns:a="http://schemas.openxmlformats.org/drawingml/2006/main">
             <a:fillRect l="0" t="0" r="0" b="0"/>
           </a:stretch>
@@ -22337,7 +22261,7 @@
           <p:nvPr/>
         </p:nvPicPr>
         <p:blipFill>
-          <a:blip xmlns:r="http://schemas.openxmlformats.org/officeDocument/2006/relationships" xmlns:a="http://schemas.openxmlformats.org/drawingml/2006/main" r:embed="R24229f4e47164d8e"/>
+          <a:blip xmlns:r="http://schemas.openxmlformats.org/officeDocument/2006/relationships" xmlns:a="http://schemas.openxmlformats.org/drawingml/2006/main" r:embed="R595a2041db1f4153"/>
           <a:stretch xmlns:a="http://schemas.openxmlformats.org/drawingml/2006/main">
             <a:fillRect l="0" t="0" r="0" b="0"/>
           </a:stretch>
@@ -23619,7 +23543,7 @@
           <p:nvPr/>
         </p:nvPicPr>
         <p:blipFill>
-          <a:blip xmlns:r="http://schemas.openxmlformats.org/officeDocument/2006/relationships" xmlns:a="http://schemas.openxmlformats.org/drawingml/2006/main" r:embed="Rc5d0202d2c044bc9"/>
+          <a:blip xmlns:r="http://schemas.openxmlformats.org/officeDocument/2006/relationships" xmlns:a="http://schemas.openxmlformats.org/drawingml/2006/main" r:embed="R244398b7096f4d0e"/>
           <a:stretch xmlns:a="http://schemas.openxmlformats.org/drawingml/2006/main">
             <a:fillRect l="0" t="0" r="0" b="0"/>
           </a:stretch>
@@ -23898,7 +23822,7 @@
           <p:nvPr/>
         </p:nvPicPr>
         <p:blipFill>
-          <a:blip xmlns:r="http://schemas.openxmlformats.org/officeDocument/2006/relationships" xmlns:a="http://schemas.openxmlformats.org/drawingml/2006/main" r:embed="R55beb11ce7234d93"/>
+          <a:blip xmlns:r="http://schemas.openxmlformats.org/officeDocument/2006/relationships" xmlns:a="http://schemas.openxmlformats.org/drawingml/2006/main" r:embed="R59d22da40ded4751"/>
           <a:stretch xmlns:a="http://schemas.openxmlformats.org/drawingml/2006/main">
             <a:fillRect l="0" t="0" r="0" b="0"/>
           </a:stretch>
@@ -25978,7 +25902,7 @@
           <p:nvPr/>
         </p:nvPicPr>
         <p:blipFill>
-          <a:blip xmlns:r="http://schemas.openxmlformats.org/officeDocument/2006/relationships" xmlns:a="http://schemas.openxmlformats.org/drawingml/2006/main" r:embed="R51fd1ee2d43f4583"/>
+          <a:blip xmlns:r="http://schemas.openxmlformats.org/officeDocument/2006/relationships" xmlns:a="http://schemas.openxmlformats.org/drawingml/2006/main" r:embed="Rec92f64ee5ad4359"/>
           <a:stretch xmlns:a="http://schemas.openxmlformats.org/drawingml/2006/main">
             <a:fillRect l="0" t="0" r="0" b="0"/>
           </a:stretch>
@@ -27391,7 +27315,7 @@
           <p:nvPr/>
         </p:nvPicPr>
         <p:blipFill>
-          <a:blip xmlns:r="http://schemas.openxmlformats.org/officeDocument/2006/relationships" xmlns:a="http://schemas.openxmlformats.org/drawingml/2006/main" r:embed="R36ba72629da04e2b"/>
+          <a:blip xmlns:r="http://schemas.openxmlformats.org/officeDocument/2006/relationships" xmlns:a="http://schemas.openxmlformats.org/drawingml/2006/main" r:embed="R01ef92c2de074e30"/>
           <a:stretch xmlns:a="http://schemas.openxmlformats.org/drawingml/2006/main">
             <a:fillRect l="0" t="0" r="0" b="0"/>
           </a:stretch>
